--- a/assets/pptx/catalog-142.pptx
+++ b/assets/pptx/catalog-142.pptx
@@ -3303,7 +3303,7 @@
                 <a:ea typeface="Ebrima"/>
                 <a:cs typeface="Ebrima"/>
               </a:rPr>
-              <a:t>እንጀራ አብልተኸኝ እንዳትሄድብኝ (3x)</a:t>
+              <a:t>እንጀራ አብልተኸኝ እንዳትሄድብኝ 3x</a:t>
             </a:r>
           </a:p>
         </p:txBody>
@@ -3442,7 +3442,7 @@
                 <a:ea typeface="Ebrima"/>
                 <a:cs typeface="Ebrima"/>
               </a:rPr>
-              <a:t>ልመናዬም እኔ (4x)</a:t>
+              <a:t>ልመናዬም እኔ 4x</a:t>
             </a:r>
           </a:p>
           <a:p>
@@ -4070,7 +4070,7 @@
                 <a:ea typeface="Ebrima"/>
                 <a:cs typeface="Ebrima"/>
               </a:rPr>
-              <a:t>ልመናዬም እኔ (4x)</a:t>
+              <a:t>ልመናዬም እኔ 4x</a:t>
             </a:r>
           </a:p>
           <a:p>
